--- a/docs/교재/실전반_오프라인/01회차/실전반_오프라인_01회차.pptx
+++ b/docs/교재/실전반_오프라인/01회차/실전반_오프라인_01회차.pptx
@@ -8932,7 +8932,7 @@
       </p:sp>
       <p:pic>
         <p:nvPicPr>
-          <p:cNvPr id="6" name="삽화:노드관계.svg" descr="illust_3603314196604550823_1791712364.png"/>
+          <p:cNvPr id="6" name="삽화:노드관계.svg" descr="illust_5729461640782666648_1791712364.png"/>
           <p:cNvPicPr>
             <a:picLocks noChangeAspect="1"/>
           </p:cNvPicPr>
@@ -9528,7 +9528,7 @@
       </p:sp>
       <p:pic>
         <p:nvPicPr>
-          <p:cNvPr id="6" name="삽화:관계.svg" descr="illust_7393509337648774574_1791712364.png"/>
+          <p:cNvPr id="6" name="삽화:관계.svg" descr="illust_4689015123647406717_1791712364.png"/>
           <p:cNvPicPr>
             <a:picLocks noChangeAspect="1"/>
           </p:cNvPicPr>
@@ -11153,7 +11153,7 @@
       </p:sp>
       <p:pic>
         <p:nvPicPr>
-          <p:cNvPr id="6" name="삽화:속성_3.svg" descr="illust_5194015114237320736_1791717240.png"/>
+          <p:cNvPr id="6" name="삽화:속성_3.svg" descr="illust_8466564648552197586_1791717240.png"/>
           <p:cNvPicPr>
             <a:picLocks noChangeAspect="1"/>
           </p:cNvPicPr>
@@ -12053,7 +12053,7 @@
       </p:sp>
       <p:pic>
         <p:nvPicPr>
-          <p:cNvPr id="6" name="삽화:두층_3.svg" descr="illust_8998041089273837938_1791717240.png"/>
+          <p:cNvPr id="6" name="삽화:두층_3.svg" descr="illust_3518034303103266499_1791717240.png"/>
           <p:cNvPicPr>
             <a:picLocks noChangeAspect="1"/>
           </p:cNvPicPr>
@@ -13152,7 +13152,7 @@
       </p:sp>
       <p:pic>
         <p:nvPicPr>
-          <p:cNvPr id="6" name="삽화:여러노드.svg" descr="illust_3250002465196844450_1791717240.png"/>
+          <p:cNvPr id="6" name="삽화:여러노드.svg" descr="illust_7155338066637172296_1791717240.png"/>
           <p:cNvPicPr>
             <a:picLocks noChangeAspect="1"/>
           </p:cNvPicPr>
@@ -17937,7 +17937,7 @@
       </p:sp>
       <p:pic>
         <p:nvPicPr>
-          <p:cNvPr id="6" name="삽화:속성그래프_3.svg" descr="illust_3168396293942835476_1791717240.png"/>
+          <p:cNvPr id="6" name="삽화:속성그래프_3.svg" descr="illust_5904603887628258243_1791717240.png"/>
           <p:cNvPicPr>
             <a:picLocks noChangeAspect="1"/>
           </p:cNvPicPr>
@@ -20831,7 +20831,7 @@
       </p:sp>
       <p:pic>
         <p:nvPicPr>
-          <p:cNvPr id="6" name="삽화:경로질의_2.svg" descr="illust_6347394441785142974_1791717240.png"/>
+          <p:cNvPr id="6" name="삽화:경로질의_2.svg" descr="illust_6480034467838334149_1791717240.png"/>
           <p:cNvPicPr>
             <a:picLocks noChangeAspect="1"/>
           </p:cNvPicPr>
@@ -22769,7 +22769,7 @@
                 <a:ea typeface="맑은 고딕"/>
                 <a:cs typeface="맑은 고딕"/>
               </a:rPr>
-              <a:t>설비 이상을 지식 관계도로 그리기</a:t>
+              <a:t>설비 이상과 원인 · 조치의 관계 그리기</a:t>
             </a:r>
           </a:p>
         </p:txBody>
@@ -22946,7 +22946,7 @@
                 <a:ea typeface="맑은 고딕"/>
                 <a:cs typeface="맑은 고딕"/>
               </a:rPr>
-              <a:t>설비 · 부품 · 센서의 공통 모델 설계하기</a:t>
+              <a:t>온톨로지 직접 설계하기</a:t>
             </a:r>
           </a:p>
         </p:txBody>
@@ -23123,7 +23123,7 @@
                 <a:ea typeface="맑은 고딕"/>
                 <a:cs typeface="맑은 고딕"/>
               </a:rPr>
-              <a:t>설계한 관계를 그래프 DB에 구현하기</a:t>
+              <a:t>설계한 관계의 그래프 DB 구현과 조회</a:t>
             </a:r>
           </a:p>
         </p:txBody>
@@ -33360,7 +33360,7 @@
       </p:sp>
       <p:pic>
         <p:nvPicPr>
-          <p:cNvPr id="6" name="삽화:설비_유압파워팩.svg" descr="illust_4961790929164091403_1791712364.png"/>
+          <p:cNvPr id="6" name="삽화:설비_유압파워팩.svg" descr="illust_2236628757479788985_1791712364.png"/>
           <p:cNvPicPr>
             <a:picLocks noChangeAspect="1"/>
           </p:cNvPicPr>
@@ -35060,7 +35060,7 @@
       </p:sp>
       <p:pic>
         <p:nvPicPr>
-          <p:cNvPr id="6" name="삽화:원인후보.svg" descr="illust_4800856576541128831_1791712364.png"/>
+          <p:cNvPr id="6" name="삽화:원인후보.svg" descr="illust_6419817758645796465_1791712364.png"/>
           <p:cNvPicPr>
             <a:picLocks noChangeAspect="1"/>
           </p:cNvPicPr>
@@ -36599,7 +36599,7 @@
       </p:sp>
       <p:pic>
         <p:nvPicPr>
-          <p:cNvPr id="6" name="삽화:흩어진정보.svg" descr="illust_4401786695660042855_1791712364.png"/>
+          <p:cNvPr id="6" name="삽화:흩어진정보.svg" descr="illust_5720220965121921600_1791712364.png"/>
           <p:cNvPicPr>
             <a:picLocks noChangeAspect="1"/>
           </p:cNvPicPr>

--- a/docs/교재/실전반_오프라인/01회차/실전반_오프라인_01회차.pptx
+++ b/docs/교재/실전반_오프라인/01회차/실전반_오프라인_01회차.pptx
@@ -8932,7 +8932,7 @@
       </p:sp>
       <p:pic>
         <p:nvPicPr>
-          <p:cNvPr id="6" name="삽화:노드관계.svg" descr="illust_5729461640782666648_1791712364.png"/>
+          <p:cNvPr id="6" name="삽화:노드관계.svg" descr="illust_4834014519850444775_1791712364.png"/>
           <p:cNvPicPr>
             <a:picLocks noChangeAspect="1"/>
           </p:cNvPicPr>
@@ -9528,7 +9528,7 @@
       </p:sp>
       <p:pic>
         <p:nvPicPr>
-          <p:cNvPr id="6" name="삽화:관계.svg" descr="illust_4689015123647406717_1791712364.png"/>
+          <p:cNvPr id="6" name="삽화:관계.svg" descr="illust_7152454102958992862_1791712364.png"/>
           <p:cNvPicPr>
             <a:picLocks noChangeAspect="1"/>
           </p:cNvPicPr>
@@ -11153,7 +11153,7 @@
       </p:sp>
       <p:pic>
         <p:nvPicPr>
-          <p:cNvPr id="6" name="삽화:속성_3.svg" descr="illust_8466564648552197586_1791717240.png"/>
+          <p:cNvPr id="6" name="삽화:속성_3.svg" descr="illust_1001446303226041418_1791717240.png"/>
           <p:cNvPicPr>
             <a:picLocks noChangeAspect="1"/>
           </p:cNvPicPr>
@@ -12053,7 +12053,7 @@
       </p:sp>
       <p:pic>
         <p:nvPicPr>
-          <p:cNvPr id="6" name="삽화:두층_3.svg" descr="illust_3518034303103266499_1791717240.png"/>
+          <p:cNvPr id="6" name="삽화:두층_3.svg" descr="illust_5535250258297434520_1791717240.png"/>
           <p:cNvPicPr>
             <a:picLocks noChangeAspect="1"/>
           </p:cNvPicPr>
@@ -13152,7 +13152,7 @@
       </p:sp>
       <p:pic>
         <p:nvPicPr>
-          <p:cNvPr id="6" name="삽화:여러노드.svg" descr="illust_7155338066637172296_1791717240.png"/>
+          <p:cNvPr id="6" name="삽화:여러노드.svg" descr="illust_6758935216584791168_1791717240.png"/>
           <p:cNvPicPr>
             <a:picLocks noChangeAspect="1"/>
           </p:cNvPicPr>
@@ -17937,7 +17937,7 @@
       </p:sp>
       <p:pic>
         <p:nvPicPr>
-          <p:cNvPr id="6" name="삽화:속성그래프_3.svg" descr="illust_5904603887628258243_1791717240.png"/>
+          <p:cNvPr id="6" name="삽화:속성그래프_3.svg" descr="illust_1142946574976373394_1791717240.png"/>
           <p:cNvPicPr>
             <a:picLocks noChangeAspect="1"/>
           </p:cNvPicPr>
@@ -20831,7 +20831,7 @@
       </p:sp>
       <p:pic>
         <p:nvPicPr>
-          <p:cNvPr id="6" name="삽화:경로질의_2.svg" descr="illust_6480034467838334149_1791717240.png"/>
+          <p:cNvPr id="6" name="삽화:경로질의_2.svg" descr="illust_658344879042556039_1791717240.png"/>
           <p:cNvPicPr>
             <a:picLocks noChangeAspect="1"/>
           </p:cNvPicPr>
@@ -33360,7 +33360,7 @@
       </p:sp>
       <p:pic>
         <p:nvPicPr>
-          <p:cNvPr id="6" name="삽화:설비_유압파워팩.svg" descr="illust_2236628757479788985_1791712364.png"/>
+          <p:cNvPr id="6" name="삽화:설비_유압파워팩.svg" descr="illust_2591401511092740179_1791712364.png"/>
           <p:cNvPicPr>
             <a:picLocks noChangeAspect="1"/>
           </p:cNvPicPr>
@@ -35060,7 +35060,7 @@
       </p:sp>
       <p:pic>
         <p:nvPicPr>
-          <p:cNvPr id="6" name="삽화:원인후보.svg" descr="illust_6419817758645796465_1791712364.png"/>
+          <p:cNvPr id="6" name="삽화:원인후보.svg" descr="illust_4710060214023009759_1791712364.png"/>
           <p:cNvPicPr>
             <a:picLocks noChangeAspect="1"/>
           </p:cNvPicPr>
@@ -36599,7 +36599,7 @@
       </p:sp>
       <p:pic>
         <p:nvPicPr>
-          <p:cNvPr id="6" name="삽화:흩어진정보.svg" descr="illust_5720220965121921600_1791712364.png"/>
+          <p:cNvPr id="6" name="삽화:흩어진정보.svg" descr="illust_7618731489997158122_1791712364.png"/>
           <p:cNvPicPr>
             <a:picLocks noChangeAspect="1"/>
           </p:cNvPicPr>
@@ -36882,7 +36882,7 @@
         <p:spPr>
           <a:xfrm>
             <a:off x="7743181" y="5244129"/>
-            <a:ext cx="3709228" cy="1026668"/>
+            <a:ext cx="3709228" cy="980185"/>
           </a:xfrm>
           <a:prstGeom prst="rect">
             <a:avLst/>
@@ -36910,7 +36910,28 @@
                 <a:ea typeface="맑은 고딕"/>
                 <a:cs typeface="맑은 고딕"/>
               </a:rPr>
-              <a:t>MES(Manufacturing Execution System)</a:t>
+              <a:t>MES</a:t>
+            </a:r>
+          </a:p>
+          <a:p>
+            <a:pPr algn="ctr">
+              <a:lnSpc>
+                <a:spcPct val="110000"/>
+              </a:lnSpc>
+              <a:spcAft>
+                <a:spcPts val="100"/>
+              </a:spcAft>
+            </a:pPr>
+            <a:r>
+              <a:rPr sz="1300" b="0">
+                <a:solidFill>
+                  <a:srgbClr val="556175"/>
+                </a:solidFill>
+                <a:latin typeface="맑은 고딕"/>
+                <a:ea typeface="맑은 고딕"/>
+                <a:cs typeface="맑은 고딕"/>
+              </a:rPr>
+              <a:t>Manufacturing Execution System</a:t>
             </a:r>
           </a:p>
           <a:p>

--- a/docs/교재/실전반_오프라인/01회차/실전반_오프라인_01회차.pptx
+++ b/docs/교재/실전반_오프라인/01회차/실전반_오프라인_01회차.pptx
@@ -1943,7 +1943,7 @@
           <a:lstStyle/>
           <a:p>
             <a:r>
-              <a:t>앞의 실습에서 설계한 스키마와 인스턴스를 그래프 DB에 넣습니다. 질의는 실행하기 전에 읽어, 노드를 식별자로 MERGE하는지와 관계의 방향이 스키마의 정의와 같은지를 확인합니다. 넣은 뒤에는 MATCH와 WHERE와 RETURN으로 원인, 설비, 부품을 찾아 결과가 설계와 같은지 대조합니다.</a:t>
+              <a:t>앞의 실습에서 설계한 스키마와 인스턴스를 그래프 DB에 넣습니다. 적재는 실습용 그래프에 하고, 수업에서 기준으로 제공하는 그래프는 읽기만 합니다. 두 그래프를 혼동하지 않도록 질의를 실행하기 전에 어느 쪽에 연결되어 있는지 확인합니다. 질의는 실행하기 전에 읽어, 노드를 식별자로 MERGE하는지와 관계의 방향이 스키마의 정의와 같은지를 확인합니다. 넣은 뒤에는 MATCH와 WHERE와 RETURN으로 원인, 설비, 부품을 찾아 결과가 설계와 같은지 대조합니다.</a:t>
             </a:r>
           </a:p>
         </p:txBody>
@@ -2083,7 +2083,7 @@
           <a:lstStyle/>
           <a:p>
             <a:r>
-              <a:t>HYD-01에서 난 쿨러 성능 저하 사건을 저장된 값으로 보겠습니다. 위가 유온, 아래가 냉각 효율입니다. 경보는 11시 13분 8초에 났는데 조치는 108초 뒤에 승인되었고, 그동안 유온은 61.8 ℃까지 올랐습니다. 경보는 조건을 벗어났다는 사실만 알리기 때문입니다. 비유 제안: 체온계의 고열 표시. 닮은 점은 열이 난다는 사실은 바로 알지만 어떤 병인지는 진찰해야 안다는 것이고, 다른 점은 이 사건에서는 응급 조치를 고르는 데에도 원인 판단이 먼저 필요했다는 것입니다.</a:t>
+              <a:t>HYD-01에서 난 쿨러 성능 저하 사건을 저장된 값으로 보겠습니다. 위가 유온, 아래가 냉각 효율입니다. 경보는 11시 13분 8초에 났는데 조치는 108초 뒤에 승인되었고, 그동안 유온은 61.8 ℃까지 올랐습니다. 경보는 조건을 벗어났다는 사실만 알리기 때문입니다. 체온계의 고열 표시에 견줄 수 있습니다. 열이 난다는 사실은 바로 알지만 어떤 병인지는 진찰해야 안다는 점이 닮았고, 이 사건에서는 응급 조치를 고르는 데에도 원인 판단이 먼저 필요했다는 점은 다릅니다.</a:t>
             </a:r>
           </a:p>
         </p:txBody>
@@ -2153,7 +2153,7 @@
           <a:lstStyle/>
           <a:p>
             <a:r>
-              <a:t>오늘 새로 쓴 용어입니다. 위의 여섯은 지식을 정의하는 쪽의 말이고 아래 둘은 그래프 DB 쪽의 말입니다. 이 가운데 하나를 골라 자료 없이 자신의 문장으로 적어 봅니다.</a:t>
+              <a:t>오늘 새로 쓴 용어입니다. 위의 일곱은 지식을 정의하는 쪽의 말이고 아래 둘은 그래프 DB 쪽의 말입니다. 이 가운데 하나를 골라 자료 없이 자신의 문장으로 적어 봅니다.</a:t>
             </a:r>
           </a:p>
         </p:txBody>
@@ -8932,7 +8932,7 @@
       </p:sp>
       <p:pic>
         <p:nvPicPr>
-          <p:cNvPr id="6" name="삽화:노드관계.svg" descr="illust_4834014519850444775_1791712364.png"/>
+          <p:cNvPr id="6" name="삽화:노드관계.svg" descr="illust_5390806876819746901_1791712364.png"/>
           <p:cNvPicPr>
             <a:picLocks noChangeAspect="1"/>
           </p:cNvPicPr>
@@ -9528,7 +9528,7 @@
       </p:sp>
       <p:pic>
         <p:nvPicPr>
-          <p:cNvPr id="6" name="삽화:관계.svg" descr="illust_7152454102958992862_1791712364.png"/>
+          <p:cNvPr id="6" name="삽화:관계.svg" descr="illust_4381669470858928208_1791712364.png"/>
           <p:cNvPicPr>
             <a:picLocks noChangeAspect="1"/>
           </p:cNvPicPr>
@@ -11153,7 +11153,7 @@
       </p:sp>
       <p:pic>
         <p:nvPicPr>
-          <p:cNvPr id="6" name="삽화:속성_3.svg" descr="illust_1001446303226041418_1791717240.png"/>
+          <p:cNvPr id="6" name="삽화:속성_3.svg" descr="illust_2602155999618802404_1791717240.png"/>
           <p:cNvPicPr>
             <a:picLocks noChangeAspect="1"/>
           </p:cNvPicPr>
@@ -12053,7 +12053,7 @@
       </p:sp>
       <p:pic>
         <p:nvPicPr>
-          <p:cNvPr id="6" name="삽화:두층_3.svg" descr="illust_5535250258297434520_1791717240.png"/>
+          <p:cNvPr id="6" name="삽화:두층_3.svg" descr="illust_4077857714746043921_1791717240.png"/>
           <p:cNvPicPr>
             <a:picLocks noChangeAspect="1"/>
           </p:cNvPicPr>
@@ -13152,7 +13152,7 @@
       </p:sp>
       <p:pic>
         <p:nvPicPr>
-          <p:cNvPr id="6" name="삽화:여러노드.svg" descr="illust_6758935216584791168_1791717240.png"/>
+          <p:cNvPr id="6" name="삽화:여러노드.svg" descr="illust_7952591207005356803_1791717240.png"/>
           <p:cNvPicPr>
             <a:picLocks noChangeAspect="1"/>
           </p:cNvPicPr>
@@ -17937,7 +17937,7 @@
       </p:sp>
       <p:pic>
         <p:nvPicPr>
-          <p:cNvPr id="6" name="삽화:속성그래프_3.svg" descr="illust_1142946574976373394_1791717240.png"/>
+          <p:cNvPr id="6" name="삽화:속성그래프_3.svg" descr="illust_2685154054175655658_1791717240.png"/>
           <p:cNvPicPr>
             <a:picLocks noChangeAspect="1"/>
           </p:cNvPicPr>
@@ -20831,7 +20831,7 @@
       </p:sp>
       <p:pic>
         <p:nvPicPr>
-          <p:cNvPr id="6" name="삽화:경로질의_2.svg" descr="illust_658344879042556039_1791717240.png"/>
+          <p:cNvPr id="6" name="삽화:경로질의_2.svg" descr="illust_7940770916500886965_1791717240.png"/>
           <p:cNvPicPr>
             <a:picLocks noChangeAspect="1"/>
           </p:cNvPicPr>
@@ -23513,7 +23513,7 @@
                 <a:ea typeface="맑은 고딕"/>
                 <a:cs typeface="맑은 고딕"/>
               </a:rPr>
-              <a:t>이 실습을 마치면 설비, 센서, 증상, 원인, 조치가 이름과 방향이 있는 관계로 이어진 그림 한 장이 만들어진다.</a:t>
+              <a:t>설비, 센서, 증상, 원인, 조치를 이름과 방향이 있는 관계로 이은 그림 한 장이 이 실습의 결과물이다.</a:t>
             </a:r>
           </a:p>
         </p:txBody>
@@ -26480,7 +26480,7 @@
                 <a:ea typeface="맑은 고딕"/>
                 <a:cs typeface="맑은 고딕"/>
               </a:rPr>
-              <a:t>그래프 DB에 넣는다</a:t>
+              <a:t>실습용 그래프에 넣는다</a:t>
             </a:r>
           </a:p>
           <a:p>
@@ -26501,7 +26501,7 @@
                 <a:ea typeface="맑은 고딕"/>
                 <a:cs typeface="맑은 고딕"/>
               </a:rPr>
-              <a:t>Neo4j에서 질의를 실행해</a:t>
+              <a:t>Neo4j의 실습용 그래프에서</a:t>
             </a:r>
           </a:p>
           <a:p>
@@ -26522,7 +26522,7 @@
                 <a:ea typeface="맑은 고딕"/>
                 <a:cs typeface="맑은 고딕"/>
               </a:rPr>
-              <a:t>노드와 관계를</a:t>
+              <a:t>질의를 실행해 노드와 관계를</a:t>
             </a:r>
           </a:p>
           <a:p>
@@ -28142,7 +28142,7 @@
                 <a:ea typeface="맑은 고딕"/>
                 <a:cs typeface="맑은 고딕"/>
               </a:rPr>
-              <a:t>오늘의 용어는 지식을 정의하는 말 여섯과 그래프 DB를 쓰는 말 둘이다.</a:t>
+              <a:t>오늘의 용어는 지식을 정의하는 말 일곱과 그래프 DB를 쓰는 말 둘이다.</a:t>
             </a:r>
           </a:p>
         </p:txBody>
@@ -28223,7 +28223,7 @@
         </p:nvSpPr>
         <p:spPr>
           <a:xfrm>
-            <a:off x="548640" y="1627632"/>
+            <a:off x="548640" y="1627631"/>
             <a:ext cx="11094415" cy="347472"/>
           </a:xfrm>
           <a:prstGeom prst="roundRect">
@@ -28254,7 +28254,7 @@
         </p:nvSpPr>
         <p:spPr>
           <a:xfrm>
-            <a:off x="685800" y="1627632"/>
+            <a:off x="685800" y="1627631"/>
             <a:ext cx="2514600" cy="347472"/>
           </a:xfrm>
           <a:prstGeom prst="rect">
@@ -28293,7 +28293,7 @@
         </p:nvSpPr>
         <p:spPr>
           <a:xfrm>
-            <a:off x="3200400" y="1627632"/>
+            <a:off x="3200400" y="1627631"/>
             <a:ext cx="6248095" cy="347472"/>
           </a:xfrm>
           <a:prstGeom prst="rect">
@@ -28332,7 +28332,7 @@
         </p:nvSpPr>
         <p:spPr>
           <a:xfrm>
-            <a:off x="9448495" y="1627632"/>
+            <a:off x="9448495" y="1627631"/>
             <a:ext cx="2194560" cy="347472"/>
           </a:xfrm>
           <a:prstGeom prst="rect">
@@ -28372,7 +28372,7 @@
         <p:spPr>
           <a:xfrm>
             <a:off x="548640" y="2061972"/>
-            <a:ext cx="11094415" cy="476631"/>
+            <a:ext cx="11094415" cy="416560"/>
           </a:xfrm>
           <a:prstGeom prst="roundRect">
             <a:avLst>
@@ -28402,8 +28402,8 @@
         </p:nvSpPr>
         <p:spPr>
           <a:xfrm>
-            <a:off x="685800" y="2029968"/>
-            <a:ext cx="2514600" cy="540639"/>
+            <a:off x="685800" y="2029967"/>
+            <a:ext cx="2514600" cy="480568"/>
           </a:xfrm>
           <a:prstGeom prst="rect">
             <a:avLst/>
@@ -28441,8 +28441,8 @@
         </p:nvSpPr>
         <p:spPr>
           <a:xfrm>
-            <a:off x="3200400" y="2029968"/>
-            <a:ext cx="6156655" cy="540639"/>
+            <a:off x="3200400" y="2029967"/>
+            <a:ext cx="6156655" cy="480568"/>
           </a:xfrm>
           <a:prstGeom prst="rect">
             <a:avLst/>
@@ -28459,7 +28459,7 @@
               </a:lnSpc>
             </a:pPr>
             <a:r>
-              <a:rPr sz="1400" b="0">
+              <a:rPr sz="1250" b="0">
                 <a:solidFill>
                   <a:srgbClr val="1F2A3A"/>
                 </a:solidFill>
@@ -28480,8 +28480,8 @@
         </p:nvSpPr>
         <p:spPr>
           <a:xfrm>
-            <a:off x="9448495" y="2029968"/>
-            <a:ext cx="2103120" cy="540639"/>
+            <a:off x="9448495" y="2029967"/>
+            <a:ext cx="2103120" cy="480568"/>
           </a:xfrm>
           <a:prstGeom prst="rect">
             <a:avLst/>
@@ -28519,8 +28519,8 @@
         </p:nvSpPr>
         <p:spPr>
           <a:xfrm>
-            <a:off x="548640" y="2602611"/>
-            <a:ext cx="11094415" cy="476631"/>
+            <a:off x="548640" y="2542540"/>
+            <a:ext cx="11094415" cy="416560"/>
           </a:xfrm>
           <a:prstGeom prst="roundRect">
             <a:avLst>
@@ -28550,8 +28550,8 @@
         </p:nvSpPr>
         <p:spPr>
           <a:xfrm>
-            <a:off x="685800" y="2570607"/>
-            <a:ext cx="2514600" cy="540639"/>
+            <a:off x="685800" y="2510536"/>
+            <a:ext cx="2514600" cy="480568"/>
           </a:xfrm>
           <a:prstGeom prst="rect">
             <a:avLst/>
@@ -28589,8 +28589,8 @@
         </p:nvSpPr>
         <p:spPr>
           <a:xfrm>
-            <a:off x="3200400" y="2570607"/>
-            <a:ext cx="6156655" cy="540639"/>
+            <a:off x="3200400" y="2510536"/>
+            <a:ext cx="6156655" cy="480568"/>
           </a:xfrm>
           <a:prstGeom prst="rect">
             <a:avLst/>
@@ -28607,7 +28607,7 @@
               </a:lnSpc>
             </a:pPr>
             <a:r>
-              <a:rPr sz="1400" b="0">
+              <a:rPr sz="1250" b="0">
                 <a:solidFill>
                   <a:srgbClr val="1F2A3A"/>
                 </a:solidFill>
@@ -28628,8 +28628,8 @@
         </p:nvSpPr>
         <p:spPr>
           <a:xfrm>
-            <a:off x="9448495" y="2570607"/>
-            <a:ext cx="2103120" cy="540639"/>
+            <a:off x="9448495" y="2510536"/>
+            <a:ext cx="2103120" cy="480568"/>
           </a:xfrm>
           <a:prstGeom prst="rect">
             <a:avLst/>
@@ -28667,8 +28667,8 @@
         </p:nvSpPr>
         <p:spPr>
           <a:xfrm>
-            <a:off x="548640" y="3143250"/>
-            <a:ext cx="11094415" cy="476631"/>
+            <a:off x="548640" y="3023108"/>
+            <a:ext cx="11094415" cy="416560"/>
           </a:xfrm>
           <a:prstGeom prst="roundRect">
             <a:avLst>
@@ -28698,8 +28698,8 @@
         </p:nvSpPr>
         <p:spPr>
           <a:xfrm>
-            <a:off x="685800" y="3111246"/>
-            <a:ext cx="2514600" cy="540639"/>
+            <a:off x="685800" y="2991104"/>
+            <a:ext cx="2514600" cy="480568"/>
           </a:xfrm>
           <a:prstGeom prst="rect">
             <a:avLst/>
@@ -28737,8 +28737,8 @@
         </p:nvSpPr>
         <p:spPr>
           <a:xfrm>
-            <a:off x="3200400" y="3111246"/>
-            <a:ext cx="6156655" cy="540639"/>
+            <a:off x="3200400" y="2991104"/>
+            <a:ext cx="6156655" cy="480568"/>
           </a:xfrm>
           <a:prstGeom prst="rect">
             <a:avLst/>
@@ -28755,7 +28755,7 @@
               </a:lnSpc>
             </a:pPr>
             <a:r>
-              <a:rPr sz="1400" b="0">
+              <a:rPr sz="1250" b="0">
                 <a:solidFill>
                   <a:srgbClr val="1F2A3A"/>
                 </a:solidFill>
@@ -28776,8 +28776,8 @@
         </p:nvSpPr>
         <p:spPr>
           <a:xfrm>
-            <a:off x="9448495" y="3111246"/>
-            <a:ext cx="2103120" cy="540639"/>
+            <a:off x="9448495" y="2991104"/>
+            <a:ext cx="2103120" cy="480568"/>
           </a:xfrm>
           <a:prstGeom prst="rect">
             <a:avLst/>
@@ -28815,8 +28815,8 @@
         </p:nvSpPr>
         <p:spPr>
           <a:xfrm>
-            <a:off x="548640" y="3683888"/>
-            <a:ext cx="11094415" cy="476631"/>
+            <a:off x="548640" y="3503676"/>
+            <a:ext cx="11094415" cy="416560"/>
           </a:xfrm>
           <a:prstGeom prst="roundRect">
             <a:avLst>
@@ -28846,8 +28846,8 @@
         </p:nvSpPr>
         <p:spPr>
           <a:xfrm>
-            <a:off x="685800" y="3651885"/>
-            <a:ext cx="2514600" cy="540639"/>
+            <a:off x="685800" y="3471672"/>
+            <a:ext cx="2514600" cy="480568"/>
           </a:xfrm>
           <a:prstGeom prst="rect">
             <a:avLst/>
@@ -28885,8 +28885,8 @@
         </p:nvSpPr>
         <p:spPr>
           <a:xfrm>
-            <a:off x="3200400" y="3651885"/>
-            <a:ext cx="6156655" cy="540639"/>
+            <a:off x="3200400" y="3471672"/>
+            <a:ext cx="6156655" cy="480568"/>
           </a:xfrm>
           <a:prstGeom prst="rect">
             <a:avLst/>
@@ -28903,7 +28903,7 @@
               </a:lnSpc>
             </a:pPr>
             <a:r>
-              <a:rPr sz="1400" b="0">
+              <a:rPr sz="1250" b="0">
                 <a:solidFill>
                   <a:srgbClr val="1F2A3A"/>
                 </a:solidFill>
@@ -28924,8 +28924,8 @@
         </p:nvSpPr>
         <p:spPr>
           <a:xfrm>
-            <a:off x="9448495" y="3651885"/>
-            <a:ext cx="2103120" cy="540639"/>
+            <a:off x="9448495" y="3471672"/>
+            <a:ext cx="2103120" cy="480568"/>
           </a:xfrm>
           <a:prstGeom prst="rect">
             <a:avLst/>
@@ -28963,8 +28963,8 @@
         </p:nvSpPr>
         <p:spPr>
           <a:xfrm>
-            <a:off x="548640" y="4224528"/>
-            <a:ext cx="11094415" cy="476631"/>
+            <a:off x="548640" y="3984244"/>
+            <a:ext cx="11094415" cy="416560"/>
           </a:xfrm>
           <a:prstGeom prst="roundRect">
             <a:avLst>
@@ -28994,8 +28994,8 @@
         </p:nvSpPr>
         <p:spPr>
           <a:xfrm>
-            <a:off x="685800" y="4192524"/>
-            <a:ext cx="2514600" cy="540639"/>
+            <a:off x="685800" y="3952239"/>
+            <a:ext cx="2514600" cy="480568"/>
           </a:xfrm>
           <a:prstGeom prst="rect">
             <a:avLst/>
@@ -29033,8 +29033,8 @@
         </p:nvSpPr>
         <p:spPr>
           <a:xfrm>
-            <a:off x="3200400" y="4192524"/>
-            <a:ext cx="6156655" cy="540639"/>
+            <a:off x="3200400" y="3952239"/>
+            <a:ext cx="6156655" cy="480568"/>
           </a:xfrm>
           <a:prstGeom prst="rect">
             <a:avLst/>
@@ -29051,7 +29051,7 @@
               </a:lnSpc>
             </a:pPr>
             <a:r>
-              <a:rPr sz="1400" b="0">
+              <a:rPr sz="1250" b="0">
                 <a:solidFill>
                   <a:srgbClr val="1F2A3A"/>
                 </a:solidFill>
@@ -29072,8 +29072,8 @@
         </p:nvSpPr>
         <p:spPr>
           <a:xfrm>
-            <a:off x="9448495" y="4192524"/>
-            <a:ext cx="2103120" cy="540639"/>
+            <a:off x="9448495" y="3952239"/>
+            <a:ext cx="2103120" cy="480568"/>
           </a:xfrm>
           <a:prstGeom prst="rect">
             <a:avLst/>
@@ -29111,8 +29111,8 @@
         </p:nvSpPr>
         <p:spPr>
           <a:xfrm>
-            <a:off x="548640" y="4765167"/>
-            <a:ext cx="11094415" cy="476631"/>
+            <a:off x="548640" y="4464811"/>
+            <a:ext cx="11094415" cy="416560"/>
           </a:xfrm>
           <a:prstGeom prst="roundRect">
             <a:avLst>
@@ -29142,8 +29142,8 @@
         </p:nvSpPr>
         <p:spPr>
           <a:xfrm>
-            <a:off x="685800" y="4733163"/>
-            <a:ext cx="2514600" cy="540639"/>
+            <a:off x="685800" y="4432807"/>
+            <a:ext cx="2514600" cy="480568"/>
           </a:xfrm>
           <a:prstGeom prst="rect">
             <a:avLst/>
@@ -29181,8 +29181,8 @@
         </p:nvSpPr>
         <p:spPr>
           <a:xfrm>
-            <a:off x="3200400" y="4733163"/>
-            <a:ext cx="6156655" cy="540639"/>
+            <a:off x="3200400" y="4432807"/>
+            <a:ext cx="6156655" cy="480568"/>
           </a:xfrm>
           <a:prstGeom prst="rect">
             <a:avLst/>
@@ -29199,7 +29199,7 @@
               </a:lnSpc>
             </a:pPr>
             <a:r>
-              <a:rPr sz="1400" b="0">
+              <a:rPr sz="1250" b="0">
                 <a:solidFill>
                   <a:srgbClr val="1F2A3A"/>
                 </a:solidFill>
@@ -29220,8 +29220,8 @@
         </p:nvSpPr>
         <p:spPr>
           <a:xfrm>
-            <a:off x="9448495" y="4733163"/>
-            <a:ext cx="2103120" cy="540639"/>
+            <a:off x="9448495" y="4432807"/>
+            <a:ext cx="2103120" cy="480568"/>
           </a:xfrm>
           <a:prstGeom prst="rect">
             <a:avLst/>
@@ -29259,8 +29259,8 @@
         </p:nvSpPr>
         <p:spPr>
           <a:xfrm>
-            <a:off x="548640" y="5305806"/>
-            <a:ext cx="11094415" cy="476631"/>
+            <a:off x="548640" y="4945380"/>
+            <a:ext cx="11094415" cy="416560"/>
           </a:xfrm>
           <a:prstGeom prst="roundRect">
             <a:avLst>
@@ -29290,8 +29290,8 @@
         </p:nvSpPr>
         <p:spPr>
           <a:xfrm>
-            <a:off x="685800" y="5273802"/>
-            <a:ext cx="2514600" cy="540639"/>
+            <a:off x="685800" y="4913376"/>
+            <a:ext cx="2514600" cy="480568"/>
           </a:xfrm>
           <a:prstGeom prst="rect">
             <a:avLst/>
@@ -29316,7 +29316,7 @@
                 <a:ea typeface="맑은 고딕"/>
                 <a:cs typeface="맑은 고딕"/>
               </a:rPr>
-              <a:t>레이블</a:t>
+              <a:t>카디널리티</a:t>
             </a:r>
           </a:p>
         </p:txBody>
@@ -29329,8 +29329,8 @@
         </p:nvSpPr>
         <p:spPr>
           <a:xfrm>
-            <a:off x="3200400" y="5273802"/>
-            <a:ext cx="6156655" cy="540639"/>
+            <a:off x="3200400" y="4913376"/>
+            <a:ext cx="6156655" cy="480568"/>
           </a:xfrm>
           <a:prstGeom prst="rect">
             <a:avLst/>
@@ -29347,7 +29347,7 @@
               </a:lnSpc>
             </a:pPr>
             <a:r>
-              <a:rPr sz="1400" b="0">
+              <a:rPr sz="1250" b="0">
                 <a:solidFill>
                   <a:srgbClr val="1F2A3A"/>
                 </a:solidFill>
@@ -29355,7 +29355,7 @@
                 <a:ea typeface="맑은 고딕"/>
                 <a:cs typeface="맑은 고딕"/>
               </a:rPr>
-              <a:t>노드의 종류를 나타내는 이름표</a:t>
+              <a:t>관계의 양쪽에 몇 개가 이어질 수 있는가</a:t>
             </a:r>
           </a:p>
         </p:txBody>
@@ -29368,8 +29368,8 @@
         </p:nvSpPr>
         <p:spPr>
           <a:xfrm>
-            <a:off x="9448495" y="5273802"/>
-            <a:ext cx="2103120" cy="540639"/>
+            <a:off x="9448495" y="4913376"/>
+            <a:ext cx="2103120" cy="480568"/>
           </a:xfrm>
           <a:prstGeom prst="rect">
             <a:avLst/>
@@ -29394,7 +29394,7 @@
                 <a:ea typeface="맑은 고딕"/>
                 <a:cs typeface="맑은 고딕"/>
               </a:rPr>
-              <a:t>Label</a:t>
+              <a:t>Cardinality</a:t>
             </a:r>
           </a:p>
         </p:txBody>
@@ -29407,8 +29407,8 @@
         </p:nvSpPr>
         <p:spPr>
           <a:xfrm>
-            <a:off x="548640" y="5846445"/>
-            <a:ext cx="11094415" cy="476631"/>
+            <a:off x="548640" y="5425948"/>
+            <a:ext cx="11094415" cy="416560"/>
           </a:xfrm>
           <a:prstGeom prst="roundRect">
             <a:avLst>
@@ -29438,8 +29438,8 @@
         </p:nvSpPr>
         <p:spPr>
           <a:xfrm>
-            <a:off x="685800" y="5814441"/>
-            <a:ext cx="2514600" cy="540639"/>
+            <a:off x="685800" y="5393944"/>
+            <a:ext cx="2514600" cy="480568"/>
           </a:xfrm>
           <a:prstGeom prst="rect">
             <a:avLst/>
@@ -29464,7 +29464,7 @@
                 <a:ea typeface="맑은 고딕"/>
                 <a:cs typeface="맑은 고딕"/>
               </a:rPr>
-              <a:t>질의</a:t>
+              <a:t>레이블</a:t>
             </a:r>
           </a:p>
         </p:txBody>
@@ -29477,8 +29477,8 @@
         </p:nvSpPr>
         <p:spPr>
           <a:xfrm>
-            <a:off x="3200400" y="5814441"/>
-            <a:ext cx="6156655" cy="540639"/>
+            <a:off x="3200400" y="5393944"/>
+            <a:ext cx="6156655" cy="480568"/>
           </a:xfrm>
           <a:prstGeom prst="rect">
             <a:avLst/>
@@ -29495,7 +29495,7 @@
               </a:lnSpc>
             </a:pPr>
             <a:r>
-              <a:rPr sz="1400" b="0">
+              <a:rPr sz="1250" b="0">
                 <a:solidFill>
                   <a:srgbClr val="1F2A3A"/>
                 </a:solidFill>
@@ -29503,7 +29503,7 @@
                 <a:ea typeface="맑은 고딕"/>
                 <a:cs typeface="맑은 고딕"/>
               </a:rPr>
-              <a:t>데이터베이스에 보내는 요청</a:t>
+              <a:t>노드의 종류를 나타내는 이름표</a:t>
             </a:r>
           </a:p>
         </p:txBody>
@@ -29516,8 +29516,8 @@
         </p:nvSpPr>
         <p:spPr>
           <a:xfrm>
-            <a:off x="9448495" y="5814441"/>
-            <a:ext cx="2103120" cy="540639"/>
+            <a:off x="9448495" y="5393944"/>
+            <a:ext cx="2103120" cy="480568"/>
           </a:xfrm>
           <a:prstGeom prst="rect">
             <a:avLst/>
@@ -29542,7 +29542,155 @@
                 <a:ea typeface="맑은 고딕"/>
                 <a:cs typeface="맑은 고딕"/>
               </a:rPr>
-              <a:t>Query</a:t>
+              <a:t>Label</a:t>
+            </a:r>
+          </a:p>
+        </p:txBody>
+      </p:sp>
+      <p:sp>
+        <p:nvSpPr>
+          <p:cNvPr id="42" name="Rounded Rectangle 41"/>
+          <p:cNvSpPr/>
+          <p:nvPr/>
+        </p:nvSpPr>
+        <p:spPr>
+          <a:xfrm>
+            <a:off x="548640" y="5906516"/>
+            <a:ext cx="11094415" cy="416560"/>
+          </a:xfrm>
+          <a:prstGeom prst="roundRect">
+            <a:avLst>
+              <a:gd name="adj" fmla="val 8000"/>
+            </a:avLst>
+          </a:prstGeom>
+          <a:solidFill>
+            <a:srgbClr val="F3F6F9"/>
+          </a:solidFill>
+          <a:ln>
+            <a:noFill/>
+          </a:ln>
+        </p:spPr>
+        <p:txBody>
+          <a:bodyPr rtlCol="0" anchor="ctr"/>
+          <a:lstStyle/>
+          <a:p>
+            <a:pPr algn="ctr"/>
+          </a:p>
+        </p:txBody>
+      </p:sp>
+      <p:sp>
+        <p:nvSpPr>
+          <p:cNvPr id="43" name="TextBox 42"/>
+          <p:cNvSpPr txBox="1"/>
+          <p:nvPr/>
+        </p:nvSpPr>
+        <p:spPr>
+          <a:xfrm>
+            <a:off x="685800" y="5874512"/>
+            <a:ext cx="2514600" cy="480568"/>
+          </a:xfrm>
+          <a:prstGeom prst="rect">
+            <a:avLst/>
+          </a:prstGeom>
+          <a:noFill/>
+        </p:spPr>
+        <p:txBody>
+          <a:bodyPr wrap="square" anchor="ctr"/>
+          <a:lstStyle/>
+          <a:p>
+            <a:pPr algn="l">
+              <a:lnSpc>
+                <a:spcPct val="110000"/>
+              </a:lnSpc>
+            </a:pPr>
+            <a:r>
+              <a:rPr sz="1450" b="1">
+                <a:solidFill>
+                  <a:srgbClr val="13294B"/>
+                </a:solidFill>
+                <a:latin typeface="맑은 고딕"/>
+                <a:ea typeface="맑은 고딕"/>
+                <a:cs typeface="맑은 고딕"/>
+              </a:rPr>
+              <a:t>Cypher</a:t>
+            </a:r>
+          </a:p>
+        </p:txBody>
+      </p:sp>
+      <p:sp>
+        <p:nvSpPr>
+          <p:cNvPr id="44" name="TextBox 43"/>
+          <p:cNvSpPr txBox="1"/>
+          <p:nvPr/>
+        </p:nvSpPr>
+        <p:spPr>
+          <a:xfrm>
+            <a:off x="3200400" y="5874512"/>
+            <a:ext cx="6156655" cy="480568"/>
+          </a:xfrm>
+          <a:prstGeom prst="rect">
+            <a:avLst/>
+          </a:prstGeom>
+          <a:noFill/>
+        </p:spPr>
+        <p:txBody>
+          <a:bodyPr wrap="square" anchor="ctr"/>
+          <a:lstStyle/>
+          <a:p>
+            <a:pPr algn="l">
+              <a:lnSpc>
+                <a:spcPct val="110000"/>
+              </a:lnSpc>
+            </a:pPr>
+            <a:r>
+              <a:rPr sz="1250" b="0">
+                <a:solidFill>
+                  <a:srgbClr val="1F2A3A"/>
+                </a:solidFill>
+                <a:latin typeface="맑은 고딕"/>
+                <a:ea typeface="맑은 고딕"/>
+                <a:cs typeface="맑은 고딕"/>
+              </a:rPr>
+              <a:t>찾을 모양을 적어 그래프 DB에 요청하는 질의 언어</a:t>
+            </a:r>
+          </a:p>
+        </p:txBody>
+      </p:sp>
+      <p:sp>
+        <p:nvSpPr>
+          <p:cNvPr id="45" name="TextBox 44"/>
+          <p:cNvSpPr txBox="1"/>
+          <p:nvPr/>
+        </p:nvSpPr>
+        <p:spPr>
+          <a:xfrm>
+            <a:off x="9448495" y="5874512"/>
+            <a:ext cx="2103120" cy="480568"/>
+          </a:xfrm>
+          <a:prstGeom prst="rect">
+            <a:avLst/>
+          </a:prstGeom>
+          <a:noFill/>
+        </p:spPr>
+        <p:txBody>
+          <a:bodyPr wrap="square" anchor="ctr"/>
+          <a:lstStyle/>
+          <a:p>
+            <a:pPr algn="l">
+              <a:lnSpc>
+                <a:spcPct val="110000"/>
+              </a:lnSpc>
+            </a:pPr>
+            <a:r>
+              <a:rPr sz="1250" b="1">
+                <a:solidFill>
+                  <a:srgbClr val="556175"/>
+                </a:solidFill>
+                <a:latin typeface="맑은 고딕"/>
+                <a:ea typeface="맑은 고딕"/>
+                <a:cs typeface="맑은 고딕"/>
+              </a:rPr>
+              <a:t>Cypher</a:t>
             </a:r>
           </a:p>
         </p:txBody>
@@ -33360,7 +33508,7 @@
       </p:sp>
       <p:pic>
         <p:nvPicPr>
-          <p:cNvPr id="6" name="삽화:설비_유압파워팩.svg" descr="illust_2591401511092740179_1791712364.png"/>
+          <p:cNvPr id="6" name="삽화:설비_유압파워팩.svg" descr="illust_4662983692160654748_1791712364.png"/>
           <p:cNvPicPr>
             <a:picLocks noChangeAspect="1"/>
           </p:cNvPicPr>
@@ -35060,7 +35208,7 @@
       </p:sp>
       <p:pic>
         <p:nvPicPr>
-          <p:cNvPr id="6" name="삽화:원인후보.svg" descr="illust_4710060214023009759_1791712364.png"/>
+          <p:cNvPr id="6" name="삽화:원인후보.svg" descr="illust_5135630002002985935_1791712364.png"/>
           <p:cNvPicPr>
             <a:picLocks noChangeAspect="1"/>
           </p:cNvPicPr>
@@ -36599,7 +36747,7 @@
       </p:sp>
       <p:pic>
         <p:nvPicPr>
-          <p:cNvPr id="6" name="삽화:흩어진정보.svg" descr="illust_7618731489997158122_1791712364.png"/>
+          <p:cNvPr id="6" name="삽화:흩어진정보.svg" descr="illust_7823530584326023584_1791712364.png"/>
           <p:cNvPicPr>
             <a:picLocks noChangeAspect="1"/>
           </p:cNvPicPr>

--- a/docs/교재/실전반_오프라인/01회차/실전반_오프라인_01회차.pptx
+++ b/docs/교재/실전반_오프라인/01회차/실전반_오프라인_01회차.pptx
@@ -8932,7 +8932,7 @@
       </p:sp>
       <p:pic>
         <p:nvPicPr>
-          <p:cNvPr id="6" name="삽화:노드관계.svg" descr="illust_5390806876819746901_1791712364.png"/>
+          <p:cNvPr id="6" name="삽화:노드관계.svg" descr="illust_461409365105305087_1791712364.png"/>
           <p:cNvPicPr>
             <a:picLocks noChangeAspect="1"/>
           </p:cNvPicPr>
@@ -9528,7 +9528,7 @@
       </p:sp>
       <p:pic>
         <p:nvPicPr>
-          <p:cNvPr id="6" name="삽화:관계.svg" descr="illust_4381669470858928208_1791712364.png"/>
+          <p:cNvPr id="6" name="삽화:관계.svg" descr="illust_6356946159029012730_1791712364.png"/>
           <p:cNvPicPr>
             <a:picLocks noChangeAspect="1"/>
           </p:cNvPicPr>
@@ -11153,7 +11153,7 @@
       </p:sp>
       <p:pic>
         <p:nvPicPr>
-          <p:cNvPr id="6" name="삽화:속성_3.svg" descr="illust_2602155999618802404_1791717240.png"/>
+          <p:cNvPr id="6" name="삽화:속성_3.svg" descr="illust_3976905974379210321_1791717240.png"/>
           <p:cNvPicPr>
             <a:picLocks noChangeAspect="1"/>
           </p:cNvPicPr>
@@ -12053,7 +12053,7 @@
       </p:sp>
       <p:pic>
         <p:nvPicPr>
-          <p:cNvPr id="6" name="삽화:두층_3.svg" descr="illust_4077857714746043921_1791717240.png"/>
+          <p:cNvPr id="6" name="삽화:두층_3.svg" descr="illust_6508419732689698995_1791717240.png"/>
           <p:cNvPicPr>
             <a:picLocks noChangeAspect="1"/>
           </p:cNvPicPr>
@@ -13152,7 +13152,7 @@
       </p:sp>
       <p:pic>
         <p:nvPicPr>
-          <p:cNvPr id="6" name="삽화:여러노드.svg" descr="illust_7952591207005356803_1791717240.png"/>
+          <p:cNvPr id="6" name="삽화:여러노드.svg" descr="illust_7878946769182421854_1791717240.png"/>
           <p:cNvPicPr>
             <a:picLocks noChangeAspect="1"/>
           </p:cNvPicPr>
@@ -17937,7 +17937,7 @@
       </p:sp>
       <p:pic>
         <p:nvPicPr>
-          <p:cNvPr id="6" name="삽화:속성그래프_3.svg" descr="illust_2685154054175655658_1791717240.png"/>
+          <p:cNvPr id="6" name="삽화:속성그래프_3.svg" descr="illust_538726765579487531_1791717240.png"/>
           <p:cNvPicPr>
             <a:picLocks noChangeAspect="1"/>
           </p:cNvPicPr>
@@ -20831,7 +20831,7 @@
       </p:sp>
       <p:pic>
         <p:nvPicPr>
-          <p:cNvPr id="6" name="삽화:경로질의_2.svg" descr="illust_7940770916500886965_1791717240.png"/>
+          <p:cNvPr id="6" name="삽화:경로질의_2.svg" descr="illust_5728628137702605682_1791717240.png"/>
           <p:cNvPicPr>
             <a:picLocks noChangeAspect="1"/>
           </p:cNvPicPr>
@@ -29862,7 +29862,7 @@
                 <a:ea typeface="맑은 고딕"/>
                 <a:cs typeface="맑은 고딕"/>
               </a:rPr>
-              <a:t>배운 내용을 바탕으로 정답을 맞춰보세요.</a:t>
+              <a:t>배운 내용을 바탕으로 정답을 맞혀 보세요.</a:t>
             </a:r>
           </a:p>
         </p:txBody>
@@ -33508,7 +33508,7 @@
       </p:sp>
       <p:pic>
         <p:nvPicPr>
-          <p:cNvPr id="6" name="삽화:설비_유압파워팩.svg" descr="illust_4662983692160654748_1791712364.png"/>
+          <p:cNvPr id="6" name="삽화:설비_유압파워팩.svg" descr="illust_5755897374666677375_1791712364.png"/>
           <p:cNvPicPr>
             <a:picLocks noChangeAspect="1"/>
           </p:cNvPicPr>
@@ -35208,7 +35208,7 @@
       </p:sp>
       <p:pic>
         <p:nvPicPr>
-          <p:cNvPr id="6" name="삽화:원인후보.svg" descr="illust_5135630002002985935_1791712364.png"/>
+          <p:cNvPr id="6" name="삽화:원인후보.svg" descr="illust_2814948881604020989_1791712364.png"/>
           <p:cNvPicPr>
             <a:picLocks noChangeAspect="1"/>
           </p:cNvPicPr>
@@ -36747,7 +36747,7 @@
       </p:sp>
       <p:pic>
         <p:nvPicPr>
-          <p:cNvPr id="6" name="삽화:흩어진정보.svg" descr="illust_7823530584326023584_1791712364.png"/>
+          <p:cNvPr id="6" name="삽화:흩어진정보.svg" descr="illust_6041404426798934613_1791712364.png"/>
           <p:cNvPicPr>
             <a:picLocks noChangeAspect="1"/>
           </p:cNvPicPr>

--- a/docs/교재/실전반_오프라인/01회차/실전반_오프라인_01회차.pptx
+++ b/docs/교재/실전반_오프라인/01회차/실전반_오프라인_01회차.pptx
@@ -1873,7 +1873,7 @@
           <a:lstStyle/>
           <a:p>
             <a:r>
-              <a:t>앞에서 센서와 오일 쿨러의 예로 본 정의의 순서를 앞서 그린 관계도로 직접 밟습니다. 정의한 내용을 Claude Code에 요구사항으로 전달해 파일을 만들게 합니다. 무엇을 클래스로 두고 무엇을 속성으로 둘지를 정하는 일은 설계하는 사람의 몫입니다.</a:t>
+              <a:t>앞에서 센서와 오일 쿨러의 예로 본 정의의 순서를 앞서 그린 관계도로 직접 밟습니다. 정의한 내용을 AI에게 요구사항으로 전달해 바이브 코딩으로 파일을 만듭니다. 무엇을 클래스로 두고 무엇을 속성으로 둘지를 정하는 일은 설계하는 사람의 몫입니다.</a:t>
             </a:r>
           </a:p>
         </p:txBody>
@@ -8932,7 +8932,7 @@
       </p:sp>
       <p:pic>
         <p:nvPicPr>
-          <p:cNvPr id="6" name="삽화:노드관계.svg" descr="illust_461409365105305087_1791712364.png"/>
+          <p:cNvPr id="6" name="삽화:노드관계.svg" descr="illust_7867290324536962592_1791712364.png"/>
           <p:cNvPicPr>
             <a:picLocks noChangeAspect="1"/>
           </p:cNvPicPr>
@@ -9528,7 +9528,7 @@
       </p:sp>
       <p:pic>
         <p:nvPicPr>
-          <p:cNvPr id="6" name="삽화:관계.svg" descr="illust_6356946159029012730_1791712364.png"/>
+          <p:cNvPr id="6" name="삽화:관계.svg" descr="illust_6599881522464788383_1791712364.png"/>
           <p:cNvPicPr>
             <a:picLocks noChangeAspect="1"/>
           </p:cNvPicPr>
@@ -11153,7 +11153,7 @@
       </p:sp>
       <p:pic>
         <p:nvPicPr>
-          <p:cNvPr id="6" name="삽화:속성_3.svg" descr="illust_3976905974379210321_1791717240.png"/>
+          <p:cNvPr id="6" name="삽화:속성_3.svg" descr="illust_390176831963700262_1791717240.png"/>
           <p:cNvPicPr>
             <a:picLocks noChangeAspect="1"/>
           </p:cNvPicPr>
@@ -12053,7 +12053,7 @@
       </p:sp>
       <p:pic>
         <p:nvPicPr>
-          <p:cNvPr id="6" name="삽화:두층_3.svg" descr="illust_6508419732689698995_1791717240.png"/>
+          <p:cNvPr id="6" name="삽화:두층_3.svg" descr="illust_3822485580918092868_1791717240.png"/>
           <p:cNvPicPr>
             <a:picLocks noChangeAspect="1"/>
           </p:cNvPicPr>
@@ -13152,7 +13152,7 @@
       </p:sp>
       <p:pic>
         <p:nvPicPr>
-          <p:cNvPr id="6" name="삽화:여러노드.svg" descr="illust_7878946769182421854_1791717240.png"/>
+          <p:cNvPr id="6" name="삽화:여러노드.svg" descr="illust_652074102767116383_1791717240.png"/>
           <p:cNvPicPr>
             <a:picLocks noChangeAspect="1"/>
           </p:cNvPicPr>
@@ -17937,7 +17937,7 @@
       </p:sp>
       <p:pic>
         <p:nvPicPr>
-          <p:cNvPr id="6" name="삽화:속성그래프_3.svg" descr="illust_538726765579487531_1791717240.png"/>
+          <p:cNvPr id="6" name="삽화:속성그래프_3.svg" descr="illust_7536753487645656453_1791717240.png"/>
           <p:cNvPicPr>
             <a:picLocks noChangeAspect="1"/>
           </p:cNvPicPr>
@@ -20831,7 +20831,7 @@
       </p:sp>
       <p:pic>
         <p:nvPicPr>
-          <p:cNvPr id="6" name="삽화:경로질의_2.svg" descr="illust_5728628137702605682_1791717240.png"/>
+          <p:cNvPr id="6" name="삽화:경로질의_2.svg" descr="illust_917781770057827228_1791717240.png"/>
           <p:cNvPicPr>
             <a:picLocks noChangeAspect="1"/>
           </p:cNvPicPr>
@@ -33508,7 +33508,7 @@
       </p:sp>
       <p:pic>
         <p:nvPicPr>
-          <p:cNvPr id="6" name="삽화:설비_유압파워팩.svg" descr="illust_5755897374666677375_1791712364.png"/>
+          <p:cNvPr id="6" name="삽화:설비_유압파워팩.svg" descr="illust_6396597276786989223_1791712364.png"/>
           <p:cNvPicPr>
             <a:picLocks noChangeAspect="1"/>
           </p:cNvPicPr>
@@ -35208,7 +35208,7 @@
       </p:sp>
       <p:pic>
         <p:nvPicPr>
-          <p:cNvPr id="6" name="삽화:원인후보.svg" descr="illust_2814948881604020989_1791712364.png"/>
+          <p:cNvPr id="6" name="삽화:원인후보.svg" descr="illust_6390954132444023213_1791712364.png"/>
           <p:cNvPicPr>
             <a:picLocks noChangeAspect="1"/>
           </p:cNvPicPr>
@@ -36747,7 +36747,7 @@
       </p:sp>
       <p:pic>
         <p:nvPicPr>
-          <p:cNvPr id="6" name="삽화:흩어진정보.svg" descr="illust_6041404426798934613_1791712364.png"/>
+          <p:cNvPr id="6" name="삽화:흩어진정보.svg" descr="illust_6886381014985186415_1791712364.png"/>
           <p:cNvPicPr>
             <a:picLocks noChangeAspect="1"/>
           </p:cNvPicPr>
